--- a/SDC/教学资料/课件/E7-AI 功能接入与验收.pptx
+++ b/SDC/教学资料/课件/E7-AI 功能接入与验收.pptx
@@ -21,13 +21,13 @@
     <p:sldId id="283" r:id="rId36"/>
     <p:sldId id="284" r:id="rId37"/>
     <p:sldId id="277" r:id="rId30"/>
+    <p:sldId id="270" r:id="rId23"/>
     <p:sldId id="278" r:id="rId31"/>
     <p:sldId id="261" r:id="rId14"/>
     <p:sldId id="279" r:id="rId32"/>
     <p:sldId id="280" r:id="rId33"/>
     <p:sldId id="264" r:id="rId17"/>
     <p:sldId id="281" r:id="rId34"/>
-    <p:sldId id="270" r:id="rId23"/>
     <p:sldId id="271" r:id="rId24"/>
     <p:sldId id="262" r:id="rId15"/>
     <p:sldId id="263" r:id="rId16"/>
